--- a/docs/SENTINEL Pitch Deck.pptx
+++ b/docs/SENTINEL Pitch Deck.pptx
@@ -4250,7 +4250,7 @@
         <p:spPr>
           <a:xfrm>
             <a:off x="2331720" y="2788920"/>
-            <a:ext cx="411480" cy="731520"/>
+            <a:ext cx="512064" cy="731520"/>
           </a:xfrm>
           <a:prstGeom prst="rect">
             <a:avLst/>
@@ -4428,7 +4428,7 @@
         <p:spPr>
           <a:xfrm>
             <a:off x="4572000" y="2788920"/>
-            <a:ext cx="411480" cy="731520"/>
+            <a:ext cx="557784" cy="731520"/>
           </a:xfrm>
           <a:prstGeom prst="rect">
             <a:avLst/>
@@ -4606,7 +4606,7 @@
         <p:spPr>
           <a:xfrm>
             <a:off x="6812280" y="2788920"/>
-            <a:ext cx="411480" cy="731520"/>
+            <a:ext cx="512064" cy="731520"/>
           </a:xfrm>
           <a:prstGeom prst="rect">
             <a:avLst/>
@@ -4784,7 +4784,7 @@
         <p:spPr>
           <a:xfrm>
             <a:off x="9052560" y="2788920"/>
-            <a:ext cx="411480" cy="731520"/>
+            <a:ext cx="512064" cy="731520"/>
           </a:xfrm>
           <a:prstGeom prst="rect">
             <a:avLst/>
